--- a/researcher_mobility_ode/docs/annual_rates_projection_figures.pptx
+++ b/researcher_mobility_ode/docs/annual_rates_projection_figures.pptx
@@ -3346,7 +3346,7 @@
         <p:spPr>
           <a:xfrm>
             <a:off x="640080" y="1097280"/>
-            <a:ext cx="10972800" cy="7000048"/>
+            <a:ext cx="10972800" cy="7001516"/>
           </a:xfrm>
           <a:prstGeom prst="rect">
             <a:avLst/>

--- a/researcher_mobility_ode/docs/annual_rates_projection_figures.pptx
+++ b/researcher_mobility_ode/docs/annual_rates_projection_figures.pptx
@@ -3346,7 +3346,7 @@
         <p:spPr>
           <a:xfrm>
             <a:off x="640080" y="1097280"/>
-            <a:ext cx="10972800" cy="7001516"/>
+            <a:ext cx="10972800" cy="7000048"/>
           </a:xfrm>
           <a:prstGeom prst="rect">
             <a:avLst/>

--- a/researcher_mobility_ode/docs/annual_rates_projection_figures.pptx
+++ b/researcher_mobility_ode/docs/annual_rates_projection_figures.pptx
@@ -3242,7 +3242,7 @@
         <p:spPr>
           <a:xfrm>
             <a:off x="640080" y="1097280"/>
-            <a:ext cx="10972800" cy="9171758"/>
+            <a:ext cx="10972800" cy="9085171"/>
           </a:xfrm>
           <a:prstGeom prst="rect">
             <a:avLst/>

--- a/researcher_mobility_ode/docs/annual_rates_projection_figures.pptx
+++ b/researcher_mobility_ode/docs/annual_rates_projection_figures.pptx
@@ -3242,7 +3242,7 @@
         <p:spPr>
           <a:xfrm>
             <a:off x="640080" y="1097280"/>
-            <a:ext cx="10972800" cy="9085171"/>
+            <a:ext cx="10972800" cy="8840963"/>
           </a:xfrm>
           <a:prstGeom prst="rect">
             <a:avLst/>
@@ -3346,7 +3346,7 @@
         <p:spPr>
           <a:xfrm>
             <a:off x="640080" y="1097280"/>
-            <a:ext cx="10972800" cy="7000048"/>
+            <a:ext cx="10972800" cy="6998581"/>
           </a:xfrm>
           <a:prstGeom prst="rect">
             <a:avLst/>

--- a/researcher_mobility_ode/docs/annual_rates_projection_figures.pptx
+++ b/researcher_mobility_ode/docs/annual_rates_projection_figures.pptx
@@ -3242,7 +3242,7 @@
         <p:spPr>
           <a:xfrm>
             <a:off x="640080" y="1097280"/>
-            <a:ext cx="10972800" cy="8840963"/>
+            <a:ext cx="10972800" cy="8919873"/>
           </a:xfrm>
           <a:prstGeom prst="rect">
             <a:avLst/>
